--- a/MSRIT_Bill_Hates_T4.pptx
+++ b/MSRIT_Bill_Hates_T4.pptx
@@ -253,8 +253,11 @@
     </a:lvl9pPr>
   </p:defaultTextStyle>
   <p:extLst>
+    <p:ext uri="{EFAFB233-063F-42B5-8137-9DF3F51BA10A}">
+      <p15:sldGuideLst xmlns:p15="http://schemas.microsoft.com/office/powerpoint/2012/main"/>
+    </p:ext>
     <p:ext uri="GoogleSlidesCustomDataVersion2">
-      <go:slidesCustomData xmlns:go="http://customooxmlschemas.google.com/" xmlns:ahyp="http://schemas.microsoft.com/office/drawing/2018/hyperlinkcolor" xmlns:p15="http://schemas.microsoft.com/office/powerpoint/2012/main" xmlns:p14="http://schemas.microsoft.com/office/powerpoint/2010/main" xmlns:com="http://schemas.openxmlformats.org/drawingml/2006/compatibility" xmlns:pvml="urn:schemas-microsoft-com:office:powerpoint" xmlns:v="urn:schemas-microsoft-com:vml" xmlns:o="urn:schemas-microsoft-com:office:office" xmlns:dgm="http://schemas.openxmlformats.org/drawingml/2006/diagram" xmlns:c="http://schemas.openxmlformats.org/drawingml/2006/chart" xmlns:mv="urn:schemas-microsoft-com:mac:vml" xmlns:mc="http://schemas.openxmlformats.org/markup-compatibility/2006" xmlns="" r:id="rId17" roundtripDataSignature="AMtx7mgQuomGbdS/wh2yqkB/K4YAZ70YAw=="/>
+      <go:slidesCustomData xmlns="" xmlns:mc="http://schemas.openxmlformats.org/markup-compatibility/2006" xmlns:mv="urn:schemas-microsoft-com:mac:vml" xmlns:c="http://schemas.openxmlformats.org/drawingml/2006/chart" xmlns:dgm="http://schemas.openxmlformats.org/drawingml/2006/diagram" xmlns:o="urn:schemas-microsoft-com:office:office" xmlns:v="urn:schemas-microsoft-com:vml" xmlns:pvml="urn:schemas-microsoft-com:office:powerpoint" xmlns:com="http://schemas.openxmlformats.org/drawingml/2006/compatibility" xmlns:p14="http://schemas.microsoft.com/office/powerpoint/2010/main" xmlns:p15="http://schemas.microsoft.com/office/powerpoint/2012/main" xmlns:ahyp="http://schemas.microsoft.com/office/drawing/2018/hyperlinkcolor" xmlns:go="http://customooxmlschemas.google.com/" r:id="rId17" roundtripDataSignature="AMtx7mgQuomGbdS/wh2yqkB/K4YAZ70YAw=="/>
     </p:ext>
   </p:extLst>
 </p:presentation>
@@ -13549,7 +13552,31 @@
                 <a:cs typeface="Calibri"/>
                 <a:sym typeface="Calibri"/>
               </a:rPr>
-              <a:t>Member Name &amp; Email 1- Arnav Vivek Bansal 1ms25cs028@gmail.com </a:t>
+              <a:t>Member Name &amp; Email 1- Arnav Vivek Bansal 1ms25cs028@</a:t>
+            </a:r>
+            <a:r>
+              <a:rPr lang="en-US" sz="1600" dirty="0">
+                <a:solidFill>
+                  <a:srgbClr val="63637E"/>
+                </a:solidFill>
+                <a:latin typeface="Calibri"/>
+                <a:ea typeface="Calibri"/>
+                <a:cs typeface="Calibri"/>
+                <a:sym typeface="Calibri"/>
+              </a:rPr>
+              <a:t>msrit.edu</a:t>
+            </a:r>
+            <a:r>
+              <a:rPr lang="en-US" sz="1600" b="0" i="0" u="none" strike="noStrike" cap="none" dirty="0">
+                <a:solidFill>
+                  <a:srgbClr val="63637E"/>
+                </a:solidFill>
+                <a:latin typeface="Calibri"/>
+                <a:ea typeface="Calibri"/>
+                <a:cs typeface="Calibri"/>
+                <a:sym typeface="Calibri"/>
+              </a:rPr>
+              <a:t> </a:t>
             </a:r>
             <a:endParaRPr lang="en-US" dirty="0"/>
           </a:p>
@@ -13578,7 +13605,19 @@
                 <a:cs typeface="Calibri"/>
                 <a:sym typeface="Calibri"/>
               </a:rPr>
-              <a:t>Member Name &amp; Email 2- Arya Vardhan Pandey 1ms25cs030@gmail.com</a:t>
+              <a:t>Member Name &amp; Email 2- Arya Vardhan Pandey 1ms25cs030@</a:t>
+            </a:r>
+            <a:r>
+              <a:rPr lang="en-US" sz="1600" dirty="0">
+                <a:solidFill>
+                  <a:srgbClr val="63637E"/>
+                </a:solidFill>
+                <a:latin typeface="Calibri"/>
+                <a:ea typeface="Calibri"/>
+                <a:cs typeface="Calibri"/>
+                <a:sym typeface="Calibri"/>
+              </a:rPr>
+              <a:t>msrit.edu</a:t>
             </a:r>
             <a:endParaRPr lang="en-US" dirty="0"/>
           </a:p>
@@ -13607,7 +13646,19 @@
                 <a:cs typeface="Calibri"/>
                 <a:sym typeface="Calibri"/>
               </a:rPr>
-              <a:t>Member Name &amp; Email 3- S. Hrithik 1ms25cs163@gmail.com</a:t>
+              <a:t>Member Name &amp; Email 3- S. Hrithik 1ms25cs163@</a:t>
+            </a:r>
+            <a:r>
+              <a:rPr lang="en-US" sz="1600" dirty="0">
+                <a:solidFill>
+                  <a:srgbClr val="63637E"/>
+                </a:solidFill>
+                <a:latin typeface="Calibri"/>
+                <a:ea typeface="Calibri"/>
+                <a:cs typeface="Calibri"/>
+                <a:sym typeface="Calibri"/>
+              </a:rPr>
+              <a:t>msrit.edu</a:t>
             </a:r>
             <a:endParaRPr dirty="0"/>
           </a:p>
@@ -13648,7 +13699,7 @@
                 <a:cs typeface="Calibri"/>
                 <a:sym typeface="Calibri"/>
               </a:rPr>
-              <a:t>1ms25me021@gmail.com</a:t>
+              <a:t>1ms25me021@msrit.edu</a:t>
             </a:r>
             <a:endParaRPr dirty="0"/>
           </a:p>
